--- a/samples/main_process/pptx/pptx_small_grouped_notes.pptx
+++ b/samples/main_process/pptx/pptx_small_grouped_notes.pptx
@@ -4190,150 +4190,180 @@
           </a:p>
         </p:txBody>
       </p:sp>
-      <p:sp>
-        <p:nvSpPr>
-          <p:cNvPr id="172" name="Item A"/>
-          <p:cNvSpPr txBox="1"/>
+      <p:grpSp>
+        <p:nvGrpSpPr>
+          <p:cNvPr id="200" name="Outer Group"/>
+          <p:cNvGrpSpPr/>
           <p:nvPr/>
-        </p:nvSpPr>
-        <p:spPr>
+        </p:nvGrpSpPr>
+        <p:grpSpPr>
           <a:xfrm>
-            <a:off x="11536527" y="4880051"/>
-            <a:ext cx="1876045" cy="808432"/>
+            <a:off x="0" y="0"/>
+            <a:ext cx="0" cy="0"/>
+            <a:chOff x="0" y="0"/>
+            <a:chExt cx="0" cy="0"/>
           </a:xfrm>
-          <a:prstGeom prst="rect">
-            <a:avLst/>
-          </a:prstGeom>
-          <a:ln w="12700">
-            <a:miter lim="400000"/>
-          </a:ln>
-          <a:extLst>
-            <a:ext uri="{C572A759-6A51-4108-AA02-DFA0A04FC94B}">
-              <ma14:wrappingTextBoxFlag xmlns:ma14="http://schemas.microsoft.com/office/mac/drawingml/2011/main" val="1"/>
-            </a:ext>
-          </a:extLst>
-        </p:spPr>
-        <p:txBody>
-          <a:bodyPr wrap="none" lIns="50800" tIns="50800" rIns="50800" bIns="50800" anchor="ctr">
-            <a:spAutoFit/>
-          </a:bodyPr>
-          <a:lstStyle/>
-          <a:p>
-            <a:pPr/>
-            <a:r>
-              <a:t>Item A</a:t>
-            </a:r>
-          </a:p>
-        </p:txBody>
-      </p:sp>
-      <p:sp>
-        <p:nvSpPr>
-          <p:cNvPr id="173" name="Item B"/>
-          <p:cNvSpPr txBox="1"/>
-          <p:nvPr/>
-        </p:nvSpPr>
-        <p:spPr>
-          <a:xfrm>
-            <a:off x="11525250" y="5618345"/>
-            <a:ext cx="1898600" cy="808433"/>
-          </a:xfrm>
-          <a:prstGeom prst="rect">
-            <a:avLst/>
-          </a:prstGeom>
-          <a:ln w="12700">
-            <a:miter lim="400000"/>
-          </a:ln>
-          <a:extLst>
-            <a:ext uri="{C572A759-6A51-4108-AA02-DFA0A04FC94B}">
-              <ma14:wrappingTextBoxFlag xmlns:ma14="http://schemas.microsoft.com/office/mac/drawingml/2011/main" val="1"/>
-            </a:ext>
-          </a:extLst>
-        </p:spPr>
-        <p:txBody>
-          <a:bodyPr wrap="none" lIns="50800" tIns="50800" rIns="50800" bIns="50800" anchor="ctr">
-            <a:spAutoFit/>
-          </a:bodyPr>
-          <a:lstStyle/>
-          <a:p>
-            <a:pPr/>
-            <a:r>
-              <a:t>Item B</a:t>
-            </a:r>
-          </a:p>
-        </p:txBody>
-      </p:sp>
-      <p:sp>
-        <p:nvSpPr>
-          <p:cNvPr id="174" name="Item C"/>
-          <p:cNvSpPr txBox="1"/>
-          <p:nvPr/>
-        </p:nvSpPr>
-        <p:spPr>
-          <a:xfrm>
-            <a:off x="11513972" y="6453784"/>
-            <a:ext cx="1921155" cy="808432"/>
-          </a:xfrm>
-          <a:prstGeom prst="rect">
-            <a:avLst/>
-          </a:prstGeom>
-          <a:ln w="12700">
-            <a:miter lim="400000"/>
-          </a:ln>
-          <a:extLst>
-            <a:ext uri="{C572A759-6A51-4108-AA02-DFA0A04FC94B}">
-              <ma14:wrappingTextBoxFlag xmlns:ma14="http://schemas.microsoft.com/office/mac/drawingml/2011/main" val="1"/>
-            </a:ext>
-          </a:extLst>
-        </p:spPr>
-        <p:txBody>
-          <a:bodyPr wrap="none" lIns="50800" tIns="50800" rIns="50800" bIns="50800" anchor="ctr">
-            <a:spAutoFit/>
-          </a:bodyPr>
-          <a:lstStyle/>
-          <a:p>
-            <a:pPr/>
-            <a:r>
-              <a:t>Item C</a:t>
-            </a:r>
-          </a:p>
-        </p:txBody>
-      </p:sp>
-      <p:sp>
-        <p:nvSpPr>
-          <p:cNvPr id="175" name="Main paragraph"/>
-          <p:cNvSpPr txBox="1"/>
-          <p:nvPr/>
-        </p:nvSpPr>
-        <p:spPr>
-          <a:xfrm>
-            <a:off x="634190" y="12417387"/>
-            <a:ext cx="4416248" cy="808433"/>
-          </a:xfrm>
-          <a:prstGeom prst="rect">
-            <a:avLst/>
-          </a:prstGeom>
-          <a:ln w="12700">
-            <a:miter lim="400000"/>
-          </a:ln>
-          <a:extLst>
-            <a:ext uri="{C572A759-6A51-4108-AA02-DFA0A04FC94B}">
-              <ma14:wrappingTextBoxFlag xmlns:ma14="http://schemas.microsoft.com/office/mac/drawingml/2011/main" val="1"/>
-            </a:ext>
-          </a:extLst>
-        </p:spPr>
-        <p:txBody>
-          <a:bodyPr wrap="none" lIns="50800" tIns="50800" rIns="50800" bIns="50800" anchor="ctr">
-            <a:spAutoFit/>
-          </a:bodyPr>
-          <a:lstStyle/>
-          <a:p>
-            <a:pPr/>
-            <a:r>
-              <a:t>Main paragraph</a:t>
-            </a:r>
-          </a:p>
-        </p:txBody>
-      </p:sp>
+        </p:grpSpPr>
+        <p:grpSp>
+          <p:nvGrpSpPr>
+            <p:cNvPr id="201" name="Items Group"/>
+            <p:cNvGrpSpPr/>
+            <p:nvPr/>
+          </p:nvGrpSpPr>
+          <p:grpSpPr>
+            <a:xfrm>
+              <a:off x="0" y="0"/>
+              <a:ext cx="0" cy="0"/>
+              <a:chOff x="0" y="0"/>
+              <a:chExt cx="0" cy="0"/>
+            </a:xfrm>
+          </p:grpSpPr>
+          <p:sp>
+            <p:nvSpPr>
+              <p:cNvPr id="172" name="Item A"/>
+              <p:cNvSpPr txBox="1"/>
+              <p:nvPr/>
+            </p:nvSpPr>
+            <p:spPr>
+              <a:xfrm>
+                <a:off x="11536527" y="4880051"/>
+                <a:ext cx="1876045" cy="808432"/>
+              </a:xfrm>
+              <a:prstGeom prst="rect">
+                <a:avLst/>
+              </a:prstGeom>
+              <a:ln w="12700">
+                <a:miter lim="400000"/>
+              </a:ln>
+              <a:extLst>
+                <a:ext uri="{C572A759-6A51-4108-AA02-DFA0A04FC94B}">
+                  <ma14:wrappingTextBoxFlag xmlns:ma14="http://schemas.microsoft.com/office/mac/drawingml/2011/main" val="1"/>
+                </a:ext>
+              </a:extLst>
+            </p:spPr>
+            <p:txBody>
+              <a:bodyPr wrap="none" lIns="50800" tIns="50800" rIns="50800" bIns="50800" anchor="ctr">
+                <a:spAutoFit/>
+              </a:bodyPr>
+              <a:lstStyle/>
+              <a:p>
+                <a:pPr/>
+                <a:r>
+                  <a:t>Item A</a:t>
+                </a:r>
+              </a:p>
+            </p:txBody>
+          </p:sp>
+          <p:sp>
+            <p:nvSpPr>
+              <p:cNvPr id="173" name="Item B"/>
+              <p:cNvSpPr txBox="1"/>
+              <p:nvPr/>
+            </p:nvSpPr>
+            <p:spPr>
+              <a:xfrm>
+                <a:off x="11525250" y="5618345"/>
+                <a:ext cx="1898600" cy="808433"/>
+              </a:xfrm>
+              <a:prstGeom prst="rect">
+                <a:avLst/>
+              </a:prstGeom>
+              <a:ln w="12700">
+                <a:miter lim="400000"/>
+              </a:ln>
+              <a:extLst>
+                <a:ext uri="{C572A759-6A51-4108-AA02-DFA0A04FC94B}">
+                  <ma14:wrappingTextBoxFlag xmlns:ma14="http://schemas.microsoft.com/office/mac/drawingml/2011/main" val="1"/>
+                </a:ext>
+              </a:extLst>
+            </p:spPr>
+            <p:txBody>
+              <a:bodyPr wrap="none" lIns="50800" tIns="50800" rIns="50800" bIns="50800" anchor="ctr">
+                <a:spAutoFit/>
+              </a:bodyPr>
+              <a:lstStyle/>
+              <a:p>
+                <a:pPr/>
+                <a:r>
+                  <a:t>Item B</a:t>
+                </a:r>
+              </a:p>
+            </p:txBody>
+          </p:sp>
+          <p:sp>
+            <p:nvSpPr>
+              <p:cNvPr id="174" name="Item C"/>
+              <p:cNvSpPr txBox="1"/>
+              <p:nvPr/>
+            </p:nvSpPr>
+            <p:spPr>
+              <a:xfrm>
+                <a:off x="11513972" y="6453784"/>
+                <a:ext cx="1921155" cy="808432"/>
+              </a:xfrm>
+              <a:prstGeom prst="rect">
+                <a:avLst/>
+              </a:prstGeom>
+              <a:ln w="12700">
+                <a:miter lim="400000"/>
+              </a:ln>
+              <a:extLst>
+                <a:ext uri="{C572A759-6A51-4108-AA02-DFA0A04FC94B}">
+                  <ma14:wrappingTextBoxFlag xmlns:ma14="http://schemas.microsoft.com/office/mac/drawingml/2011/main" val="1"/>
+                </a:ext>
+              </a:extLst>
+            </p:spPr>
+            <p:txBody>
+              <a:bodyPr wrap="none" lIns="50800" tIns="50800" rIns="50800" bIns="50800" anchor="ctr">
+                <a:spAutoFit/>
+              </a:bodyPr>
+              <a:lstStyle/>
+              <a:p>
+                <a:pPr/>
+                <a:r>
+                  <a:t>Item C</a:t>
+                </a:r>
+              </a:p>
+            </p:txBody>
+          </p:sp>
+        </p:grpSp>
+        <p:sp>
+          <p:nvSpPr>
+            <p:cNvPr id="175" name="Main paragraph"/>
+            <p:cNvSpPr txBox="1"/>
+            <p:nvPr/>
+          </p:nvSpPr>
+          <p:spPr>
+            <a:xfrm>
+              <a:off x="634190" y="12417387"/>
+              <a:ext cx="4416248" cy="808433"/>
+            </a:xfrm>
+            <a:prstGeom prst="rect">
+              <a:avLst/>
+            </a:prstGeom>
+            <a:ln w="12700">
+              <a:miter lim="400000"/>
+            </a:ln>
+            <a:extLst>
+              <a:ext uri="{C572A759-6A51-4108-AA02-DFA0A04FC94B}">
+                <ma14:wrappingTextBoxFlag xmlns:ma14="http://schemas.microsoft.com/office/mac/drawingml/2011/main" val="1"/>
+              </a:ext>
+            </a:extLst>
+          </p:spPr>
+          <p:txBody>
+            <a:bodyPr wrap="none" lIns="50800" tIns="50800" rIns="50800" bIns="50800" anchor="ctr">
+              <a:spAutoFit/>
+            </a:bodyPr>
+            <a:lstStyle/>
+            <a:p>
+              <a:pPr/>
+              <a:r>
+                <a:t>Main paragraph</a:t>
+              </a:r>
+            </a:p>
+          </p:txBody>
+        </p:sp>
+      </p:grpSp>
     </p:spTree>
   </p:cSld>
   <p:clrMapOvr>
